--- a/decks/geog-weather-climate/geog-weather-climate_ch6_ice-age-and-climate-change.pptx
+++ b/decks/geog-weather-climate/geog-weather-climate_ch6_ice-age-and-climate-change.pptx
@@ -125,30 +125,30 @@
   <p:extLst>
     <p:ext uri="{521415D9-36F7-43E2-AB2F-B90AF26B5E84}">
       <p14:sectionLst xmlns:p14="http://schemas.microsoft.com/office/powerpoint/2010/main">
-        <p14:section name="Opening" id="{9d5cd63d-caa7-503a-40c3-87b9c322ceb4}">
+        <p14:section name="Opening" id="{d10e3874-6895-db82-c611-8aae2a533834}">
           <p14:sldIdLst>
             <p14:sldId id="256"/>
           </p14:sldIdLst>
         </p14:section>
-        <p14:section name="Gate" id="{8164a0a6-9009-830f-9ffd-cb3b8541e7b7}">
+        <p14:section name="Gate" id="{bfdc06ef-96d1-24be-cf09-15ff0f05df59}">
           <p14:sldIdLst>
             <p14:sldId id="257"/>
             <p14:sldId id="258"/>
           </p14:sldIdLst>
         </p14:section>
-        <p14:section name="Pre-teach" id="{e5cdfddd-251a-9394-cba7-fc0994ef8e8c}">
+        <p14:section name="Pre-teach" id="{83106a10-76fd-f822-6e1b-2092b53a453c}">
           <p14:sldIdLst>
             <p14:sldId id="259"/>
             <p14:sldId id="260"/>
           </p14:sldIdLst>
         </p14:section>
-        <p14:section name="Read-along" id="{eb91169c-45a7-040a-52b2-0ec7683272e9}">
+        <p14:section name="Read-along" id="{0cb3b8d8-4040-6886-63d2-48240eb53531}">
           <p14:sldIdLst>
             <p14:sldId id="261"/>
             <p14:sldId id="262"/>
           </p14:sldIdLst>
         </p14:section>
-        <p14:section name="Teach" id="{5cd6ed81-c351-bb68-3759-2d618dec9592}">
+        <p14:section name="Teach" id="{c3373fdc-2434-b3aa-df9c-b35387a0be84}">
           <p14:sldIdLst>
             <p14:sldId id="263"/>
             <p14:sldId id="264"/>
@@ -157,19 +157,19 @@
             <p14:sldId id="267"/>
           </p14:sldIdLst>
         </p14:section>
-        <p14:section name="Routes" id="{c097e629-e9f9-89d4-89a8-ae0d5d1a27c8}">
+        <p14:section name="Routes" id="{21ff5ba2-c3d9-49a5-a3a6-401cb1cab95d}">
           <p14:sldIdLst>
             <p14:sldId id="268"/>
             <p14:sldId id="269"/>
             <p14:sldId id="270"/>
           </p14:sldIdLst>
         </p14:section>
-        <p14:section name="Close" id="{46f316ce-9678-2d42-5858-76e1a33677ff}">
+        <p14:section name="Close" id="{6425737c-fd0f-1af3-6e4e-018305d2ccea}">
           <p14:sldIdLst>
             <p14:sldId id="271"/>
           </p14:sldIdLst>
         </p14:section>
-        <p14:section name="Answers" id="{d0bb499a-f724-497f-e4a9-d06eaec5dc9c}">
+        <p14:section name="Answers" id="{6e95b7d4-7ab9-62b8-5ed9-34e33cf7f7f4}">
           <p14:sldIdLst>
             <p14:sldId id="272"/>
             <p14:sldId id="273"/>
@@ -949,7 +949,7 @@
               <a:t>Task 1: Cause and explanation. Same task, three ways in: one destination for everyone; only the scaffold changes. Pupils take the lane their do-now score pointed to (3/3 Stretch, 2/3 Core, 0–1 Support) and may move up at any time.
 Start the pre-teach group first: they know the words and the passage, so set them going on the task before you turn to the rest. Recall before help: every pupil tries from memory before opening a lane.
 The task: Match each cause of climate change to its explanation.
-Support — work through the steps with the group: (1) Two of these are human and two are natural. Sort them first. (2) Fossil fuels are burned, so look for the explanation about burning. (3) Deforestation is about trees, so look for the one that mentions trees. (4) Of the two natural causes, one is about a volcano and one is about the Earth moving around the sun.
+Support — work through the steps with the group: (1) Two of these are human and two are natural. Sort them first. (2) Fossil fuels are burned, so look for the explanation about burning. (3) Deforestation is about trees, so look for the one that mentions trees. (4) Of the two natural causes in this list, one is about a volcano and one is about the Earth moving around the sun.
 Parallel worked example for Support (model it, do not give the task answer): Match: agriculture, solar output. Choices: the sun giving out slightly more or less energy; cattle and rice fields giving off methane. Agriculture is farming, so cattle and rice fields.; Solar means the sun.. Answer: Agriculture: cattle and rice fields giving off methane. Solar output: the sun giving out slightly more or less energy..
 Core — reveal the hint only on request: Burning, trees, ash, and the Earth's path round the sun. Each explanation has one giveaway word.
 Stretch — no help; when finished: Explain why deforestation counts twice: what is lost when the trees go, and what is released if they are burned.</a:t>
@@ -1043,7 +1043,7 @@
               <a:t>Task 1: Cause and explanation. Same task, three ways in: one destination for everyone; only the scaffold changes. Pupils take the lane their do-now score pointed to (3/3 Stretch, 2/3 Core, 0–1 Support) and may move up at any time.
 Start the pre-teach group first: they know the words and the passage, so set them going on the task before you turn to the rest. Recall before help: every pupil tries from memory before opening a lane.
 The task: Match each cause of climate change to its explanation.
-Support — work through the steps with the group: (1) Two of these are human and two are natural. Sort them first. (2) Fossil fuels are burned, so look for the explanation about burning. (3) Deforestation is about trees, so look for the one that mentions trees. (4) Of the two natural causes, one is about a volcano and one is about the Earth moving around the sun.
+Support — work through the steps with the group: (1) Two of these are human and two are natural. Sort them first. (2) Fossil fuels are burned, so look for the explanation about burning. (3) Deforestation is about trees, so look for the one that mentions trees. (4) Of the two natural causes in this list, one is about a volcano and one is about the Earth moving around the sun.
 Parallel worked example for Support (model it, do not give the task answer): Match: agriculture, solar output. Choices: the sun giving out slightly more or less energy; cattle and rice fields giving off methane. Agriculture is farming, so cattle and rice fields.; Solar means the sun.. Answer: Agriculture: cattle and rice fields giving off methane. Solar output: the sun giving out slightly more or less energy..
 Core — reveal the hint only on request: Burning, trees, ash, and the Earth's path round the sun. Each explanation has one giveaway word.
 Stretch — no help; when finished: Explain why deforestation counts twice: what is lost when the trees go, and what is released if they are burned.</a:t>
@@ -2161,7 +2161,7 @@
             <a:r>
               <a:rPr lang="en-US" dirty="0"/>
               <a:t>Teach — The last Ice Age. Say it in your own words, then check understanding with a quick question: ask a pupil from the pre-teach group first, since they met these words and ideas before the lesson. Pupils try to recall before you re-explain.
-Climate is the usual weather over many years, but over thousands of years even the climate changes. About 20 000 years ago the Earth was in the grip of an Ice Age. The climate was far colder than today, and ice covered much of the continent of Europe, including most of the United Kingdom. Where you are sitting now may have been under hundreds of metres of ice, with only the south of England left as a cold, treeless land where few plants could grow and animals adapted to the cold roamed.
+Climate is the usual weather over many years, but over thousands of years even the climate changes. About 20 000 years ago the Earth was in the grip of an Ice Age. The climate was far colder than today, and a sheet of ice lay across northern Europe, reaching down over nearly all of Britain. Where you are sitting now may have been under hundreds of metres of ice, with only the south of England left as a cold, treeless land where few plants could grow and animals adapted to the cold roamed.
 The ice is still with us, but there is far less of it. Today ice covers about 10 per cent of the Earth's land surface, in the form of glaciers, ice caps and ice sheets. A glacier is a large mass of ice, often shaped like a river, that flows very slowly downhill under the force of gravity. Glaciers grow and shrink with the seasons: they thicken when winter snow piles up and thin when summer melts it.
 An Ice Age changes the sea as well as the land. The water locked up in the ice sheets had to come from somewhere, and it came from the oceans, so sea level was much lower than it is now. As the ice melted at the end of the Ice Age, that water returned to the sea and sea level rose. When you link the timeline of the Ice Age to sea level, remember: more ice means lower seas, less ice means higher seas.
 Worked example — model it step by step, thinking aloud: The last Ice Age was about 20 000 years ago. About how many centuries is that? And if ice covers about 10 per cent of the Earth's land surface today, what percentage of the land is not covered by ice? (1) A century is 100 years, so divide the years by 100: 20 000 ÷ 100 = 200 centuries. (2) Check by multiplying back: 200 × 100 = 20 000. (3) The whole land surface is 100 per cent. Take away the 10 per cent that is ice: 100 − 10 = 90 per cent. (4) Two different questions, two different units: centuries for the first, per cent for the second. Answer: About 200 centuries; about 90 per cent of the land surface is not covered by ice..
@@ -2254,7 +2254,7 @@
             <a:r>
               <a:rPr lang="en-US" dirty="0"/>
               <a:t>Teach — The last Ice Age. Say it in your own words, then check understanding with a quick question: ask a pupil from the pre-teach group first, since they met these words and ideas before the lesson. Pupils try to recall before you re-explain.
-Climate is the usual weather over many years, but over thousands of years even the climate changes. About 20 000 years ago the Earth was in the grip of an Ice Age. The climate was far colder than today, and ice covered much of the continent of Europe, including most of the United Kingdom. Where you are sitting now may have been under hundreds of metres of ice, with only the south of England left as a cold, treeless land where few plants could grow and animals adapted to the cold roamed.
+Climate is the usual weather over many years, but over thousands of years even the climate changes. About 20 000 years ago the Earth was in the grip of an Ice Age. The climate was far colder than today, and a sheet of ice lay across northern Europe, reaching down over nearly all of Britain. Where you are sitting now may have been under hundreds of metres of ice, with only the south of England left as a cold, treeless land where few plants could grow and animals adapted to the cold roamed.
 The ice is still with us, but there is far less of it. Today ice covers about 10 per cent of the Earth's land surface, in the form of glaciers, ice caps and ice sheets. A glacier is a large mass of ice, often shaped like a river, that flows very slowly downhill under the force of gravity. Glaciers grow and shrink with the seasons: they thicken when winter snow piles up and thin when summer melts it.
 An Ice Age changes the sea as well as the land. The water locked up in the ice sheets had to come from somewhere, and it came from the oceans, so sea level was much lower than it is now. As the ice melted at the end of the Ice Age, that water returned to the sea and sea level rose. When you link the timeline of the Ice Age to sea level, remember: more ice means lower seas, less ice means higher seas.
 Worked example — model it step by step, thinking aloud: The last Ice Age was about 20 000 years ago. About how many centuries is that? And if ice covers about 10 per cent of the Earth's land surface today, what percentage of the land is not covered by ice? (1) A century is 100 years, so divide the years by 100: 20 000 ÷ 100 = 200 centuries. (2) Check by multiplying back: 200 × 100 = 20 000. (3) The whole land surface is 100 per cent. Take away the 10 per cent that is ice: 100 − 10 = 90 per cent. (4) Two different questions, two different units: centuries for the first, per cent for the second. Answer: About 200 centuries; about 90 per cent of the land surface is not covered by ice..
@@ -7814,7 +7814,7 @@
                 <a:ea typeface="Calibri" pitchFamily="34" charset="-122"/>
                 <a:cs typeface="Calibri" pitchFamily="34" charset="-120"/>
               </a:rPr>
-              <a:t>Of the two natural causes, one is about a volcano and one is about the Earth moving around the sun.</a:t>
+              <a:t>Of the two natural causes in this list, one is about a volcano and one is about the Earth moving around the sun.</a:t>
             </a:r>
             <a:endParaRPr lang="en-US" sz="1800" dirty="0"/>
           </a:p>
